--- a/media/exports/reports/2026-04/volunteers.pptx
+++ b/media/exports/reports/2026-04/volunteers.pptx
@@ -197,22 +197,22 @@
               <c:strCache>
                 <c:ptCount val="6"/>
                 <c:pt idx="0">
+                  <c:v>Volunteer coordinator</c:v>
+                </c:pt>
+                <c:pt idx="1">
+                  <c:v>Housing support</c:v>
+                </c:pt>
+                <c:pt idx="2">
+                  <c:v>Digital literacy</c:v>
+                </c:pt>
+                <c:pt idx="3">
+                  <c:v>Youth outreach</c:v>
+                </c:pt>
+                <c:pt idx="4">
                   <c:v>Community meals</c:v>
                 </c:pt>
-                <c:pt idx="1">
+                <c:pt idx="5">
                   <c:v>Mental health first aid</c:v>
-                </c:pt>
-                <c:pt idx="2">
-                  <c:v>Volunteer coordinator</c:v>
-                </c:pt>
-                <c:pt idx="3">
-                  <c:v>Housing support</c:v>
-                </c:pt>
-                <c:pt idx="4">
-                  <c:v>Digital literacy</c:v>
-                </c:pt>
-                <c:pt idx="5">
-                  <c:v>Youth outreach</c:v>
                 </c:pt>
               </c:strCache>
             </c:strRef>
@@ -224,22 +224,22 @@
                 <c:formatCode>#,##0;[Red](#,##0)</c:formatCode>
                 <c:ptCount val="6"/>
                 <c:pt idx="0">
-                  <c:v>112.0</c:v>
+                  <c:v>74.5</c:v>
                 </c:pt>
                 <c:pt idx="1">
-                  <c:v>112.5</c:v>
+                  <c:v>86.5</c:v>
                 </c:pt>
                 <c:pt idx="2">
-                  <c:v>118.5</c:v>
+                  <c:v>128.0</c:v>
                 </c:pt>
                 <c:pt idx="3">
-                  <c:v>134.5</c:v>
+                  <c:v>160.0</c:v>
                 </c:pt>
                 <c:pt idx="4">
-                  <c:v>154.0</c:v>
+                  <c:v>167.5</c:v>
                 </c:pt>
                 <c:pt idx="5">
-                  <c:v>163.0</c:v>
+                  <c:v>199.5</c:v>
                 </c:pt>
               </c:numCache>
             </c:numRef>
@@ -303,7 +303,7 @@
       <c:valAx>
         <c:axId val="-2113994440"/>
         <c:scaling>
-          <c:max val="187.45"/>
+          <c:max val="229.42499999999998"/>
           <c:min val="0.0"/>
         </c:scaling>
         <c:delete/>
@@ -454,61 +454,61 @@
                 <c:formatCode>#,##0;[Red](#,##0)</c:formatCode>
                 <c:ptCount val="19"/>
                 <c:pt idx="0">
-                  <c:v>317.5</c:v>
+                  <c:v>381.0</c:v>
                 </c:pt>
                 <c:pt idx="1">
-                  <c:v>392.0</c:v>
+                  <c:v>373.5</c:v>
                 </c:pt>
                 <c:pt idx="2">
-                  <c:v>363.5</c:v>
+                  <c:v>383.5</c:v>
                 </c:pt>
                 <c:pt idx="3">
-                  <c:v>399.0</c:v>
+                  <c:v>387.5</c:v>
                 </c:pt>
                 <c:pt idx="4">
-                  <c:v>422.0</c:v>
+                  <c:v>376.5</c:v>
                 </c:pt>
                 <c:pt idx="5">
-                  <c:v>451.5</c:v>
+                  <c:v>444.0</c:v>
                 </c:pt>
                 <c:pt idx="6">
-                  <c:v>445.0</c:v>
+                  <c:v>422.5</c:v>
                 </c:pt>
                 <c:pt idx="7">
-                  <c:v>513.0</c:v>
+                  <c:v>562.0</c:v>
                 </c:pt>
                 <c:pt idx="8">
-                  <c:v>529.0</c:v>
+                  <c:v>568.0</c:v>
                 </c:pt>
                 <c:pt idx="9">
-                  <c:v>586.0</c:v>
+                  <c:v>609.5</c:v>
                 </c:pt>
                 <c:pt idx="10">
-                  <c:v>560.5</c:v>
+                  <c:v>627.0</c:v>
                 </c:pt>
                 <c:pt idx="11">
-                  <c:v>625.5</c:v>
+                  <c:v>708.5</c:v>
                 </c:pt>
                 <c:pt idx="12">
-                  <c:v>669.5</c:v>
+                  <c:v>817.0</c:v>
                 </c:pt>
                 <c:pt idx="13">
-                  <c:v>626.5</c:v>
+                  <c:v>780.5</c:v>
                 </c:pt>
                 <c:pt idx="14">
-                  <c:v>683.0</c:v>
+                  <c:v>830.5</c:v>
                 </c:pt>
                 <c:pt idx="15">
-                  <c:v>711.5</c:v>
+                  <c:v>817.5</c:v>
                 </c:pt>
                 <c:pt idx="16">
-                  <c:v>700.0</c:v>
+                  <c:v>781.0</c:v>
                 </c:pt>
                 <c:pt idx="17">
-                  <c:v>772.0</c:v>
+                  <c:v>870.0</c:v>
                 </c:pt>
                 <c:pt idx="18">
-                  <c:v>794.5</c:v>
+                  <c:v>816.0</c:v>
                 </c:pt>
               </c:numCache>
             </c:numRef>
@@ -1082,7 +1082,7 @@
           <a:lstStyle/>
           <a:p>
             <a:r>
-              <a:t>How many volunteer hours go into each program?. Volunteer hours, April: 794.5 h; Volunteers who did a shift, April: 53; Hours per volunteer, April: 15.0 h; April last year: 445.0 h. 53 volunteers gave 794.5 h in April, against 772.0 h in March. Youth outreach drew the most (163.0 h, 20.5%). Community meals had the fewest volunteer hours (112.0 h). Hours are up 78.5% on April last year.</a:t>
+              <a:t>How many volunteer hours go into each program?. Volunteer hours, April: 816.0 h; Volunteers who did a shift, April: 58; Hours per volunteer, April: 14.1 h; April last year: 422.5 h. 58 volunteers gave 816.0 h in April, against 870.0 h in March. Mental health first aid drew the most (199.5 h, 24.4%). Volunteer coordinator had the fewest volunteer hours (74.5 h). Hours are up 93.1% on April last year.</a:t>
             </a:r>
           </a:p>
         </p:txBody>
@@ -4567,7 +4567,7 @@
                 </a:solidFill>
                 <a:latin typeface="Roboto"/>
               </a:rPr>
-              <a:t>Data retrieved 2pm, Tue 6 Oct 2026 · Generated 8 Oct 2026, 6:29pm · Sample data · Made with Python (python-pptx)</a:t>
+              <a:t>Data retrieved 2pm, Tue 6 Oct 2026 · Generated 8 Oct 2026, 11:41pm · Sample data · Made with Python (python-pptx)</a:t>
             </a:r>
           </a:p>
         </p:txBody>
@@ -4913,7 +4913,7 @@
                 </a:solidFill>
                 <a:latin typeface="Roboto"/>
               </a:rPr>
-              <a:t>794.5 h</a:t>
+              <a:t>816.0 h</a:t>
             </a:r>
           </a:p>
         </p:txBody>
@@ -4952,7 +4952,7 @@
                 </a:solidFill>
                 <a:latin typeface="Roboto"/>
               </a:rPr>
-              <a:t>March 772.0 h</a:t>
+              <a:t>March 870.0 h</a:t>
             </a:r>
           </a:p>
         </p:txBody>
@@ -5079,7 +5079,7 @@
                 </a:solidFill>
                 <a:latin typeface="Roboto"/>
               </a:rPr>
-              <a:t>53</a:t>
+              <a:t>58</a:t>
             </a:r>
           </a:p>
         </p:txBody>
@@ -5118,7 +5118,7 @@
                 </a:solidFill>
                 <a:latin typeface="Roboto"/>
               </a:rPr>
-              <a:t>March 52</a:t>
+              <a:t>March 58</a:t>
             </a:r>
           </a:p>
         </p:txBody>
@@ -5245,7 +5245,7 @@
                 </a:solidFill>
                 <a:latin typeface="Roboto"/>
               </a:rPr>
-              <a:t>15.0 h</a:t>
+              <a:t>14.1 h</a:t>
             </a:r>
           </a:p>
         </p:txBody>
@@ -5411,7 +5411,7 @@
                 </a:solidFill>
                 <a:latin typeface="Roboto"/>
               </a:rPr>
-              <a:t>445.0 h</a:t>
+              <a:t>422.5 h</a:t>
             </a:r>
           </a:p>
         </p:txBody>
@@ -5595,7 +5595,7 @@
                 </a:solidFill>
                 <a:latin typeface="Roboto"/>
               </a:rPr>
-              <a:t>53 volunteers gave 794.5 h in April, against 772.0 h in March. Youth outreach drew the most (163.0 h, 20.5%).</a:t>
+              <a:t>58 volunteers gave 816.0 h in April, against 870.0 h in March. Mental health first aid drew the most (199.5 h, 24.4%).</a:t>
             </a:r>
           </a:p>
         </p:txBody>
@@ -5722,7 +5722,7 @@
                 </a:solidFill>
                 <a:latin typeface="Roboto"/>
               </a:rPr>
-              <a:t>Community meals had the fewest volunteer hours (112.0 h). Hours are up 78.5% on April last year.</a:t>
+              <a:t>Volunteer coordinator had the fewest volunteer hours (74.5 h). Hours are up 93.1% on April last year.</a:t>
             </a:r>
           </a:p>
         </p:txBody>
@@ -5800,7 +5800,7 @@
                 </a:solidFill>
                 <a:latin typeface="Roboto"/>
               </a:rPr>
-              <a:t>Data retrieved 2pm, Tue 6 Oct 2026 · Generated 8 Oct 2026, 6:29pm · Sample data · Made with Python (python-pptx)</a:t>
+              <a:t>Data retrieved 2pm, Tue 6 Oct 2026 · Generated 8 Oct 2026, 11:41pm · Sample data · Made with Python (python-pptx)</a:t>
             </a:r>
           </a:p>
         </p:txBody>
@@ -6115,7 +6115,7 @@
                 </a:solidFill>
                 <a:latin typeface="Roboto"/>
               </a:rPr>
-              <a:t>Data retrieved 2pm, Tue 6 Oct 2026 · Generated 8 Oct 2026, 6:29pm · Sample data · Made with Python (python-pptx)</a:t>
+              <a:t>Data retrieved 2pm, Tue 6 Oct 2026 · Generated 8 Oct 2026, 11:41pm · Sample data · Made with Python (python-pptx)</a:t>
             </a:r>
           </a:p>
         </p:txBody>

--- a/media/exports/reports/2026-04/volunteers.pptx
+++ b/media/exports/reports/2026-04/volunteers.pptx
@@ -1012,7 +1012,7 @@
           <a:lstStyle/>
           <a:p>
             <a:r>
-              <a:t>How many volunteer hours go into each program?. Sample Community Services Ltd. Period: April 2026. Every volunteer shift: who (a code, not a name), which program, and how many hours.</a:t>
+              <a:t>How many volunteer hours go into each program?. Sample Community Services Ltd. Period: April 2026. In short: 816.0 h of volunteer time in April, from 58 volunteers; most went to Mental health first aid. Every volunteer shift: who (a code, not a name), which program, and how many hours.</a:t>
             </a:r>
           </a:p>
         </p:txBody>
@@ -4377,7 +4377,7 @@
         <p:spPr>
           <a:xfrm>
             <a:off x="457200" y="3703320"/>
-            <a:ext cx="11277295" cy="313690"/>
+            <a:ext cx="11277295" cy="535940"/>
           </a:xfrm>
           <a:prstGeom prst="rect">
             <a:avLst/>
@@ -4402,7 +4402,7 @@
                 </a:solidFill>
                 <a:latin typeface="Roboto"/>
               </a:rPr>
-              <a:t>Period: April 2026. Every volunteer shift: who (a code, not a name), which program, and how many hours.</a:t>
+              <a:t>Period: April 2026. In short: 816.0 h of volunteer time in April, from 58 volunteers; most went to Mental health first aid. Every volunteer shift: who (a code, not a name), which program, and how many hours.</a:t>
             </a:r>
           </a:p>
         </p:txBody>
@@ -4415,7 +4415,7 @@
         </p:nvSpPr>
         <p:spPr>
           <a:xfrm>
-            <a:off x="457200" y="4108450"/>
+            <a:off x="457200" y="4330700"/>
             <a:ext cx="11277295" cy="1097280"/>
           </a:xfrm>
           <a:prstGeom prst="rect">
@@ -4567,7 +4567,7 @@
                 </a:solidFill>
                 <a:latin typeface="Roboto"/>
               </a:rPr>
-              <a:t>Data retrieved 2pm, Tue 6 Oct 2026 · Generated 8 Oct 2026, 11:41pm · Sample data · Made with Python (python-pptx)</a:t>
+              <a:t>Data retrieved 2pm, Tue 6 Oct 2026 · Generated 10 Oct 2026, 9:55pm · Sample data · Made with Python (python-pptx)</a:t>
             </a:r>
           </a:p>
         </p:txBody>
@@ -5800,7 +5800,7 @@
                 </a:solidFill>
                 <a:latin typeface="Roboto"/>
               </a:rPr>
-              <a:t>Data retrieved 2pm, Tue 6 Oct 2026 · Generated 8 Oct 2026, 11:41pm · Sample data · Made with Python (python-pptx)</a:t>
+              <a:t>Data retrieved 2pm, Tue 6 Oct 2026 · Generated 10 Oct 2026, 9:55pm · Sample data · Made with Python (python-pptx)</a:t>
             </a:r>
           </a:p>
         </p:txBody>
@@ -6115,7 +6115,7 @@
                 </a:solidFill>
                 <a:latin typeface="Roboto"/>
               </a:rPr>
-              <a:t>Data retrieved 2pm, Tue 6 Oct 2026 · Generated 8 Oct 2026, 11:41pm · Sample data · Made with Python (python-pptx)</a:t>
+              <a:t>Data retrieved 2pm, Tue 6 Oct 2026 · Generated 10 Oct 2026, 9:55pm · Sample data · Made with Python (python-pptx)</a:t>
             </a:r>
           </a:p>
         </p:txBody>
